--- a/발표자료/20260116_3주차과제발표_애니메이션1실_김동근.pptx
+++ b/발표자료/20260116_3주차과제발표_애니메이션1실_김동근.pptx
@@ -13,16 +13,17 @@
     <p:sldId id="293" r:id="rId7"/>
     <p:sldId id="295" r:id="rId8"/>
     <p:sldId id="294" r:id="rId9"/>
-    <p:sldId id="296" r:id="rId10"/>
-    <p:sldId id="258" r:id="rId11"/>
-    <p:sldId id="298" r:id="rId12"/>
-    <p:sldId id="297" r:id="rId13"/>
-    <p:sldId id="299" r:id="rId14"/>
-    <p:sldId id="300" r:id="rId15"/>
-    <p:sldId id="301" r:id="rId16"/>
-    <p:sldId id="302" r:id="rId17"/>
-    <p:sldId id="303" r:id="rId18"/>
-    <p:sldId id="284" r:id="rId19"/>
+    <p:sldId id="304" r:id="rId10"/>
+    <p:sldId id="296" r:id="rId11"/>
+    <p:sldId id="258" r:id="rId12"/>
+    <p:sldId id="298" r:id="rId13"/>
+    <p:sldId id="297" r:id="rId14"/>
+    <p:sldId id="299" r:id="rId15"/>
+    <p:sldId id="300" r:id="rId16"/>
+    <p:sldId id="301" r:id="rId17"/>
+    <p:sldId id="302" r:id="rId18"/>
+    <p:sldId id="303" r:id="rId19"/>
+    <p:sldId id="284" r:id="rId20"/>
   </p:sldIdLst>
   <p:sldSz cx="12192000" cy="6858000"/>
   <p:notesSz cx="6858000" cy="9144000"/>
@@ -15023,6 +15024,512 @@
           <p:cNvPr id="2" name="제목 1">
             <a:extLst>
               <a:ext uri="{FF2B5EF4-FFF2-40B4-BE49-F238E27FC236}">
+                <a16:creationId xmlns:a16="http://schemas.microsoft.com/office/drawing/2014/main" id="{9EB2F96C-8F3C-F239-86A7-C8F20AED2928}"/>
+              </a:ext>
+            </a:extLst>
+          </p:cNvPr>
+          <p:cNvSpPr>
+            <a:spLocks noGrp="1"/>
+          </p:cNvSpPr>
+          <p:nvPr>
+            <p:ph type="title"/>
+          </p:nvPr>
+        </p:nvSpPr>
+        <p:spPr/>
+        <p:txBody>
+          <a:bodyPr/>
+          <a:lstStyle/>
+          <a:p>
+            <a:r>
+              <a:rPr lang="ko-KR" altLang="en-US" b="1" dirty="0"/>
+              <a:t>최적화</a:t>
+            </a:r>
+            <a:r>
+              <a:rPr lang="en-US" altLang="ko-KR" b="1" dirty="0"/>
+              <a:t>: </a:t>
+            </a:r>
+            <a:r>
+              <a:rPr lang="ko-KR" altLang="en-US" b="1" dirty="0"/>
+              <a:t>대용량 </a:t>
+            </a:r>
+            <a:r>
+              <a:rPr lang="en-US" altLang="ko-KR" b="1" dirty="0"/>
+              <a:t>XML </a:t>
+            </a:r>
+            <a:r>
+              <a:rPr lang="ko-KR" altLang="en-US" b="1" dirty="0"/>
+              <a:t>파일</a:t>
+            </a:r>
+          </a:p>
+        </p:txBody>
+      </p:sp>
+      <p:sp>
+        <p:nvSpPr>
+          <p:cNvPr id="3" name="내용 개체 틀 2">
+            <a:extLst>
+              <a:ext uri="{FF2B5EF4-FFF2-40B4-BE49-F238E27FC236}">
+                <a16:creationId xmlns:a16="http://schemas.microsoft.com/office/drawing/2014/main" id="{5CBA3459-E195-CA8E-AED7-4CBE5714889A}"/>
+              </a:ext>
+            </a:extLst>
+          </p:cNvPr>
+          <p:cNvSpPr>
+            <a:spLocks noGrp="1"/>
+          </p:cNvSpPr>
+          <p:nvPr>
+            <p:ph idx="1"/>
+          </p:nvPr>
+        </p:nvSpPr>
+        <p:spPr/>
+        <p:txBody>
+          <a:bodyPr/>
+          <a:lstStyle/>
+          <a:p>
+            <a:r>
+              <a:rPr lang="en-US" altLang="ko-KR" dirty="0"/>
+              <a:t>100,000 Frame</a:t>
+            </a:r>
+          </a:p>
+          <a:p>
+            <a:r>
+              <a:rPr lang="en-US" altLang="ko-KR" dirty="0"/>
+              <a:t>135MB</a:t>
+            </a:r>
+          </a:p>
+          <a:p>
+            <a:pPr marL="0" indent="0">
+              <a:buNone/>
+            </a:pPr>
+            <a:endParaRPr lang="en-US" altLang="ko-KR" dirty="0"/>
+          </a:p>
+        </p:txBody>
+      </p:sp>
+      <p:graphicFrame>
+        <p:nvGraphicFramePr>
+          <p:cNvPr id="6" name="표 5">
+            <a:extLst>
+              <a:ext uri="{FF2B5EF4-FFF2-40B4-BE49-F238E27FC236}">
+                <a16:creationId xmlns:a16="http://schemas.microsoft.com/office/drawing/2014/main" id="{160F2B37-05AE-3473-546A-383CE056F5E3}"/>
+              </a:ext>
+            </a:extLst>
+          </p:cNvPr>
+          <p:cNvGraphicFramePr>
+            <a:graphicFrameLocks noGrp="1"/>
+          </p:cNvGraphicFramePr>
+          <p:nvPr>
+            <p:extLst>
+              <p:ext uri="{D42A27DB-BD31-4B8C-83A1-F6EECF244321}">
+                <p14:modId xmlns:p14="http://schemas.microsoft.com/office/powerpoint/2010/main" val="3679497737"/>
+              </p:ext>
+            </p:extLst>
+          </p:nvPr>
+        </p:nvGraphicFramePr>
+        <p:xfrm>
+          <a:off x="2426538" y="3106860"/>
+          <a:ext cx="7338924" cy="2240934"/>
+        </p:xfrm>
+        <a:graphic>
+          <a:graphicData uri="http://schemas.openxmlformats.org/drawingml/2006/table">
+            <a:tbl>
+              <a:tblPr firstRow="1" firstCol="1">
+                <a:tableStyleId>{5C22544A-7EE6-4342-B048-85BDC9FD1C3A}</a:tableStyleId>
+              </a:tblPr>
+              <a:tblGrid>
+                <a:gridCol w="3030874">
+                  <a:extLst>
+                    <a:ext uri="{9D8B030D-6E8A-4147-A177-3AD203B41FA5}">
+                      <a16:colId xmlns:a16="http://schemas.microsoft.com/office/drawing/2014/main" val="2374379353"/>
+                    </a:ext>
+                  </a:extLst>
+                </a:gridCol>
+                <a:gridCol w="2187019">
+                  <a:extLst>
+                    <a:ext uri="{9D8B030D-6E8A-4147-A177-3AD203B41FA5}">
+                      <a16:colId xmlns:a16="http://schemas.microsoft.com/office/drawing/2014/main" val="587336318"/>
+                    </a:ext>
+                  </a:extLst>
+                </a:gridCol>
+                <a:gridCol w="2121031">
+                  <a:extLst>
+                    <a:ext uri="{9D8B030D-6E8A-4147-A177-3AD203B41FA5}">
+                      <a16:colId xmlns:a16="http://schemas.microsoft.com/office/drawing/2014/main" val="661680372"/>
+                    </a:ext>
+                  </a:extLst>
+                </a:gridCol>
+              </a:tblGrid>
+              <a:tr h="342577">
+                <a:tc>
+                  <a:txBody>
+                    <a:bodyPr/>
+                    <a:lstStyle/>
+                    <a:p>
+                      <a:pPr latinLnBrk="1"/>
+                      <a:endParaRPr lang="ko-KR" altLang="en-US" dirty="0"/>
+                    </a:p>
+                  </a:txBody>
+                  <a:tcPr/>
+                </a:tc>
+                <a:tc>
+                  <a:txBody>
+                    <a:bodyPr/>
+                    <a:lstStyle/>
+                    <a:p>
+                      <a:pPr algn="ctr" latinLnBrk="1"/>
+                      <a:r>
+                        <a:rPr lang="ko-KR" altLang="en-US" dirty="0"/>
+                        <a:t>파일 크기</a:t>
+                      </a:r>
+                      <a:r>
+                        <a:rPr lang="en-US" altLang="ko-KR" dirty="0"/>
+                        <a:t>(MB)</a:t>
+                      </a:r>
+                      <a:endParaRPr lang="ko-KR" altLang="en-US" dirty="0"/>
+                    </a:p>
+                  </a:txBody>
+                  <a:tcPr/>
+                </a:tc>
+                <a:tc>
+                  <a:txBody>
+                    <a:bodyPr/>
+                    <a:lstStyle/>
+                    <a:p>
+                      <a:pPr algn="ctr" latinLnBrk="1"/>
+                      <a:r>
+                        <a:rPr lang="ko-KR" altLang="en-US" dirty="0"/>
+                        <a:t>로딩 속도</a:t>
+                      </a:r>
+                      <a:r>
+                        <a:rPr lang="en-US" altLang="ko-KR" dirty="0"/>
+                        <a:t>(</a:t>
+                      </a:r>
+                      <a:r>
+                        <a:rPr lang="en-US" altLang="ko-KR" dirty="0" err="1"/>
+                        <a:t>ms</a:t>
+                      </a:r>
+                      <a:r>
+                        <a:rPr lang="en-US" altLang="ko-KR" dirty="0"/>
+                        <a:t>)</a:t>
+                      </a:r>
+                      <a:endParaRPr lang="ko-KR" altLang="en-US" dirty="0"/>
+                    </a:p>
+                  </a:txBody>
+                  <a:tcPr/>
+                </a:tc>
+                <a:extLst>
+                  <a:ext uri="{0D108BD9-81ED-4DB2-BD59-A6C34878D82A}">
+                    <a16:rowId xmlns:a16="http://schemas.microsoft.com/office/drawing/2014/main" val="137458644"/>
+                  </a:ext>
+                </a:extLst>
+              </a:tr>
+              <a:tr h="342577">
+                <a:tc>
+                  <a:txBody>
+                    <a:bodyPr/>
+                    <a:lstStyle/>
+                    <a:p>
+                      <a:pPr latinLnBrk="1"/>
+                      <a:r>
+                        <a:rPr lang="en-US" altLang="ko-KR" dirty="0"/>
+                        <a:t>XML </a:t>
+                      </a:r>
+                      <a:r>
+                        <a:rPr lang="ko-KR" altLang="en-US" dirty="0"/>
+                        <a:t>파일</a:t>
+                      </a:r>
+                    </a:p>
+                  </a:txBody>
+                  <a:tcPr/>
+                </a:tc>
+                <a:tc>
+                  <a:txBody>
+                    <a:bodyPr/>
+                    <a:lstStyle/>
+                    <a:p>
+                      <a:pPr algn="ctr" latinLnBrk="1"/>
+                      <a:r>
+                        <a:rPr lang="en-US" altLang="ko-KR" dirty="0"/>
+                        <a:t>135</a:t>
+                      </a:r>
+                      <a:endParaRPr lang="ko-KR" altLang="en-US" dirty="0"/>
+                    </a:p>
+                  </a:txBody>
+                  <a:tcPr/>
+                </a:tc>
+                <a:tc>
+                  <a:txBody>
+                    <a:bodyPr/>
+                    <a:lstStyle/>
+                    <a:p>
+                      <a:pPr algn="ctr" latinLnBrk="1"/>
+                      <a:r>
+                        <a:rPr lang="en-US" altLang="ko-KR" dirty="0"/>
+                        <a:t>6646</a:t>
+                      </a:r>
+                      <a:endParaRPr lang="ko-KR" altLang="en-US" dirty="0"/>
+                    </a:p>
+                  </a:txBody>
+                  <a:tcPr/>
+                </a:tc>
+                <a:extLst>
+                  <a:ext uri="{0D108BD9-81ED-4DB2-BD59-A6C34878D82A}">
+                    <a16:rowId xmlns:a16="http://schemas.microsoft.com/office/drawing/2014/main" val="2907623311"/>
+                  </a:ext>
+                </a:extLst>
+              </a:tr>
+              <a:tr h="342577">
+                <a:tc>
+                  <a:txBody>
+                    <a:bodyPr/>
+                    <a:lstStyle/>
+                    <a:p>
+                      <a:pPr latinLnBrk="1"/>
+                      <a:r>
+                        <a:rPr lang="en-US" altLang="ko-KR" dirty="0"/>
+                        <a:t>XML + </a:t>
+                      </a:r>
+                      <a:r>
+                        <a:rPr lang="en-US" altLang="ko-KR" dirty="0" err="1"/>
+                        <a:t>zlib</a:t>
+                      </a:r>
+                      <a:endParaRPr lang="en-US" altLang="ko-KR" dirty="0"/>
+                    </a:p>
+                  </a:txBody>
+                  <a:tcPr/>
+                </a:tc>
+                <a:tc>
+                  <a:txBody>
+                    <a:bodyPr/>
+                    <a:lstStyle/>
+                    <a:p>
+                      <a:pPr algn="ctr" latinLnBrk="1"/>
+                      <a:r>
+                        <a:rPr lang="en-US" altLang="ko-KR" dirty="0"/>
+                        <a:t>14.6</a:t>
+                      </a:r>
+                      <a:endParaRPr lang="ko-KR" altLang="en-US" dirty="0"/>
+                    </a:p>
+                  </a:txBody>
+                  <a:tcPr/>
+                </a:tc>
+                <a:tc>
+                  <a:txBody>
+                    <a:bodyPr/>
+                    <a:lstStyle/>
+                    <a:p>
+                      <a:pPr algn="ctr" latinLnBrk="1"/>
+                      <a:r>
+                        <a:rPr lang="en-US" altLang="ko-KR" dirty="0"/>
+                        <a:t>6029</a:t>
+                      </a:r>
+                      <a:endParaRPr lang="ko-KR" altLang="en-US" dirty="0"/>
+                    </a:p>
+                  </a:txBody>
+                  <a:tcPr/>
+                </a:tc>
+                <a:extLst>
+                  <a:ext uri="{0D108BD9-81ED-4DB2-BD59-A6C34878D82A}">
+                    <a16:rowId xmlns:a16="http://schemas.microsoft.com/office/drawing/2014/main" val="158919561"/>
+                  </a:ext>
+                </a:extLst>
+              </a:tr>
+              <a:tr h="342577">
+                <a:tc>
+                  <a:txBody>
+                    <a:bodyPr/>
+                    <a:lstStyle/>
+                    <a:p>
+                      <a:pPr latinLnBrk="1"/>
+                      <a:r>
+                        <a:rPr lang="en-US" altLang="ko-KR" dirty="0"/>
+                        <a:t>Binary + </a:t>
+                      </a:r>
+                      <a:r>
+                        <a:rPr lang="en-US" altLang="ko-KR" dirty="0" err="1"/>
+                        <a:t>zlib</a:t>
+                      </a:r>
+                      <a:endParaRPr lang="ko-KR" altLang="en-US" dirty="0"/>
+                    </a:p>
+                  </a:txBody>
+                  <a:tcPr/>
+                </a:tc>
+                <a:tc>
+                  <a:txBody>
+                    <a:bodyPr/>
+                    <a:lstStyle/>
+                    <a:p>
+                      <a:pPr algn="ctr" latinLnBrk="1"/>
+                      <a:r>
+                        <a:rPr lang="en-US" altLang="ko-KR" dirty="0"/>
+                        <a:t>11.6</a:t>
+                      </a:r>
+                      <a:endParaRPr lang="ko-KR" altLang="en-US" dirty="0"/>
+                    </a:p>
+                  </a:txBody>
+                  <a:tcPr/>
+                </a:tc>
+                <a:tc>
+                  <a:txBody>
+                    <a:bodyPr/>
+                    <a:lstStyle/>
+                    <a:p>
+                      <a:pPr algn="ctr" latinLnBrk="1"/>
+                      <a:r>
+                        <a:rPr lang="en-US" altLang="ko-KR" dirty="0"/>
+                        <a:t>134</a:t>
+                      </a:r>
+                      <a:endParaRPr lang="ko-KR" altLang="en-US" dirty="0"/>
+                    </a:p>
+                  </a:txBody>
+                  <a:tcPr/>
+                </a:tc>
+                <a:extLst>
+                  <a:ext uri="{0D108BD9-81ED-4DB2-BD59-A6C34878D82A}">
+                    <a16:rowId xmlns:a16="http://schemas.microsoft.com/office/drawing/2014/main" val="3096869042"/>
+                  </a:ext>
+                </a:extLst>
+              </a:tr>
+              <a:tr h="342577">
+                <a:tc>
+                  <a:txBody>
+                    <a:bodyPr/>
+                    <a:lstStyle/>
+                    <a:p>
+                      <a:pPr latinLnBrk="1"/>
+                      <a:r>
+                        <a:rPr lang="en-US" altLang="ko-KR" dirty="0"/>
+                        <a:t>Binary + lz4</a:t>
+                      </a:r>
+                      <a:endParaRPr lang="ko-KR" altLang="en-US" dirty="0"/>
+                    </a:p>
+                  </a:txBody>
+                  <a:tcPr/>
+                </a:tc>
+                <a:tc>
+                  <a:txBody>
+                    <a:bodyPr/>
+                    <a:lstStyle/>
+                    <a:p>
+                      <a:pPr algn="ctr" latinLnBrk="1"/>
+                      <a:r>
+                        <a:rPr lang="en-US" altLang="ko-KR" dirty="0"/>
+                        <a:t>20.5</a:t>
+                      </a:r>
+                      <a:endParaRPr lang="ko-KR" altLang="en-US" dirty="0"/>
+                    </a:p>
+                  </a:txBody>
+                  <a:tcPr/>
+                </a:tc>
+                <a:tc>
+                  <a:txBody>
+                    <a:bodyPr/>
+                    <a:lstStyle/>
+                    <a:p>
+                      <a:pPr algn="ctr" latinLnBrk="1"/>
+                      <a:r>
+                        <a:rPr lang="en-US" altLang="ko-KR" dirty="0"/>
+                        <a:t>65</a:t>
+                      </a:r>
+                      <a:endParaRPr lang="ko-KR" altLang="en-US" dirty="0"/>
+                    </a:p>
+                  </a:txBody>
+                  <a:tcPr/>
+                </a:tc>
+                <a:extLst>
+                  <a:ext uri="{0D108BD9-81ED-4DB2-BD59-A6C34878D82A}">
+                    <a16:rowId xmlns:a16="http://schemas.microsoft.com/office/drawing/2014/main" val="558521025"/>
+                  </a:ext>
+                </a:extLst>
+              </a:tr>
+              <a:tr h="412134">
+                <a:tc>
+                  <a:txBody>
+                    <a:bodyPr/>
+                    <a:lstStyle/>
+                    <a:p>
+                      <a:pPr latinLnBrk="1"/>
+                      <a:r>
+                        <a:rPr lang="en-US" altLang="ko-KR" dirty="0"/>
+                        <a:t>Binary + lz4 + Zero-Copy</a:t>
+                      </a:r>
+                      <a:endParaRPr lang="ko-KR" altLang="en-US" dirty="0"/>
+                    </a:p>
+                  </a:txBody>
+                  <a:tcPr/>
+                </a:tc>
+                <a:tc>
+                  <a:txBody>
+                    <a:bodyPr/>
+                    <a:lstStyle/>
+                    <a:p>
+                      <a:pPr algn="ctr" latinLnBrk="1"/>
+                      <a:r>
+                        <a:rPr lang="en-US" altLang="ko-KR" dirty="0"/>
+                        <a:t>20.5</a:t>
+                      </a:r>
+                      <a:endParaRPr lang="ko-KR" altLang="en-US" dirty="0"/>
+                    </a:p>
+                  </a:txBody>
+                  <a:tcPr/>
+                </a:tc>
+                <a:tc>
+                  <a:txBody>
+                    <a:bodyPr/>
+                    <a:lstStyle/>
+                    <a:p>
+                      <a:pPr algn="ctr" latinLnBrk="1"/>
+                      <a:r>
+                        <a:rPr lang="en-US" altLang="ko-KR" dirty="0"/>
+                        <a:t>46</a:t>
+                      </a:r>
+                      <a:endParaRPr lang="ko-KR" altLang="en-US" dirty="0"/>
+                    </a:p>
+                  </a:txBody>
+                  <a:tcPr/>
+                </a:tc>
+                <a:extLst>
+                  <a:ext uri="{0D108BD9-81ED-4DB2-BD59-A6C34878D82A}">
+                    <a16:rowId xmlns:a16="http://schemas.microsoft.com/office/drawing/2014/main" val="2890192193"/>
+                  </a:ext>
+                </a:extLst>
+              </a:tr>
+            </a:tbl>
+          </a:graphicData>
+        </a:graphic>
+      </p:graphicFrame>
+    </p:spTree>
+    <p:extLst>
+      <p:ext uri="{BB962C8B-B14F-4D97-AF65-F5344CB8AC3E}">
+        <p14:creationId xmlns:p14="http://schemas.microsoft.com/office/powerpoint/2010/main" val="4029030819"/>
+      </p:ext>
+    </p:extLst>
+  </p:cSld>
+  <p:clrMapOvr>
+    <a:masterClrMapping/>
+  </p:clrMapOvr>
+</p:sld>
+</file>
+
+<file path=ppt/slides/slide11.xml><?xml version="1.0" encoding="utf-8"?>
+<p:sld xmlns:a="http://schemas.openxmlformats.org/drawingml/2006/main" xmlns:r="http://schemas.openxmlformats.org/officeDocument/2006/relationships" xmlns:p="http://schemas.openxmlformats.org/presentationml/2006/main">
+  <p:cSld>
+    <p:spTree>
+      <p:nvGrpSpPr>
+        <p:cNvPr id="1" name=""/>
+        <p:cNvGrpSpPr/>
+        <p:nvPr/>
+      </p:nvGrpSpPr>
+      <p:grpSpPr>
+        <a:xfrm>
+          <a:off x="0" y="0"/>
+          <a:ext cx="0" cy="0"/>
+          <a:chOff x="0" y="0"/>
+          <a:chExt cx="0" cy="0"/>
+        </a:xfrm>
+      </p:grpSpPr>
+      <p:sp>
+        <p:nvSpPr>
+          <p:cNvPr id="2" name="제목 1">
+            <a:extLst>
+              <a:ext uri="{FF2B5EF4-FFF2-40B4-BE49-F238E27FC236}">
                 <a16:creationId xmlns:a16="http://schemas.microsoft.com/office/drawing/2014/main" id="{6ED38E15-68FB-962C-F88C-A6CFE3A57B7C}"/>
               </a:ext>
             </a:extLst>
@@ -15582,7 +16089,7 @@
 </p:sld>
 </file>
 
-<file path=ppt/slides/slide11.xml><?xml version="1.0" encoding="utf-8"?>
+<file path=ppt/slides/slide12.xml><?xml version="1.0" encoding="utf-8"?>
 <p:sld xmlns:a="http://schemas.openxmlformats.org/drawingml/2006/main" xmlns:r="http://schemas.openxmlformats.org/officeDocument/2006/relationships" xmlns:p="http://schemas.openxmlformats.org/presentationml/2006/main">
   <p:cSld>
     <p:spTree>
@@ -16189,7 +16696,7 @@
 </p:sld>
 </file>
 
-<file path=ppt/slides/slide12.xml><?xml version="1.0" encoding="utf-8"?>
+<file path=ppt/slides/slide13.xml><?xml version="1.0" encoding="utf-8"?>
 <p:sld xmlns:a="http://schemas.openxmlformats.org/drawingml/2006/main" xmlns:r="http://schemas.openxmlformats.org/officeDocument/2006/relationships" xmlns:p="http://schemas.openxmlformats.org/presentationml/2006/main">
   <p:cSld>
     <p:spTree>
@@ -16529,7 +17036,7 @@
 </p:sld>
 </file>
 
-<file path=ppt/slides/slide13.xml><?xml version="1.0" encoding="utf-8"?>
+<file path=ppt/slides/slide14.xml><?xml version="1.0" encoding="utf-8"?>
 <p:sld xmlns:a="http://schemas.openxmlformats.org/drawingml/2006/main" xmlns:r="http://schemas.openxmlformats.org/officeDocument/2006/relationships" xmlns:p="http://schemas.openxmlformats.org/presentationml/2006/main">
   <p:cSld>
     <p:spTree>
@@ -17386,7 +17893,7 @@
 </p:sld>
 </file>
 
-<file path=ppt/slides/slide14.xml><?xml version="1.0" encoding="utf-8"?>
+<file path=ppt/slides/slide15.xml><?xml version="1.0" encoding="utf-8"?>
 <p:sld xmlns:a="http://schemas.openxmlformats.org/drawingml/2006/main" xmlns:r="http://schemas.openxmlformats.org/officeDocument/2006/relationships" xmlns:p="http://schemas.openxmlformats.org/presentationml/2006/main">
   <p:cSld>
     <p:spTree>
@@ -18067,7 +18574,7 @@
 </p:sld>
 </file>
 
-<file path=ppt/slides/slide15.xml><?xml version="1.0" encoding="utf-8"?>
+<file path=ppt/slides/slide16.xml><?xml version="1.0" encoding="utf-8"?>
 <p:sld xmlns:a="http://schemas.openxmlformats.org/drawingml/2006/main" xmlns:r="http://schemas.openxmlformats.org/officeDocument/2006/relationships" xmlns:p="http://schemas.openxmlformats.org/presentationml/2006/main">
   <p:cSld>
     <p:spTree>
@@ -18742,7 +19249,7 @@
 </p:sld>
 </file>
 
-<file path=ppt/slides/slide16.xml><?xml version="1.0" encoding="utf-8"?>
+<file path=ppt/slides/slide17.xml><?xml version="1.0" encoding="utf-8"?>
 <p:sld xmlns:a="http://schemas.openxmlformats.org/drawingml/2006/main" xmlns:r="http://schemas.openxmlformats.org/officeDocument/2006/relationships" xmlns:p="http://schemas.openxmlformats.org/presentationml/2006/main">
   <p:cSld>
     <p:spTree>
@@ -19411,7 +19918,7 @@
 </p:sld>
 </file>
 
-<file path=ppt/slides/slide17.xml><?xml version="1.0" encoding="utf-8"?>
+<file path=ppt/slides/slide18.xml><?xml version="1.0" encoding="utf-8"?>
 <p:sld xmlns:a="http://schemas.openxmlformats.org/drawingml/2006/main" xmlns:r="http://schemas.openxmlformats.org/officeDocument/2006/relationships" xmlns:p="http://schemas.openxmlformats.org/presentationml/2006/main">
   <p:cSld>
     <p:spTree>
@@ -19559,7 +20066,7 @@
 </p:sld>
 </file>
 
-<file path=ppt/slides/slide18.xml><?xml version="1.0" encoding="utf-8"?>
+<file path=ppt/slides/slide19.xml><?xml version="1.0" encoding="utf-8"?>
 <p:sld xmlns:a="http://schemas.openxmlformats.org/drawingml/2006/main" xmlns:r="http://schemas.openxmlformats.org/officeDocument/2006/relationships" xmlns:p="http://schemas.openxmlformats.org/presentationml/2006/main">
   <p:cSld>
     <p:spTree>
@@ -21148,6 +21655,12 @@
             <a:endParaRPr lang="en-US" altLang="ko-KR" dirty="0"/>
           </a:p>
           <a:p>
+            <a:pPr marL="0" indent="0">
+              <a:buNone/>
+            </a:pPr>
+            <a:endParaRPr lang="en-US" altLang="ko-KR" dirty="0"/>
+          </a:p>
+          <a:p>
             <a:r>
               <a:rPr lang="en-US" altLang="ko-KR" dirty="0"/>
               <a:t>Spawner</a:t>
@@ -21170,7 +21683,7 @@
             </a:r>
             <a:r>
               <a:rPr lang="ko-KR" altLang="en-US" dirty="0"/>
-              <a:t>혹은 중간에</a:t>
+              <a:t>혹은 중간</a:t>
             </a:r>
             <a:r>
               <a:rPr lang="en-US" altLang="ko-KR" dirty="0"/>
@@ -21204,6 +21717,12 @@
               <a:rPr lang="ko-KR" altLang="en-US" dirty="0"/>
               <a:t>이 자유롭게 움직일 수 있음</a:t>
             </a:r>
+            <a:endParaRPr lang="en-US" altLang="ko-KR" dirty="0"/>
+          </a:p>
+          <a:p>
+            <a:pPr marL="0" indent="0">
+              <a:buNone/>
+            </a:pPr>
             <a:endParaRPr lang="en-US" altLang="ko-KR" dirty="0"/>
           </a:p>
           <a:p>
@@ -22017,7 +22536,13 @@
   <p:cSld>
     <p:spTree>
       <p:nvGrpSpPr>
-        <p:cNvPr id="1" name=""/>
+        <p:cNvPr id="1" name="">
+          <a:extLst>
+            <a:ext uri="{FF2B5EF4-FFF2-40B4-BE49-F238E27FC236}">
+              <a16:creationId xmlns:a16="http://schemas.microsoft.com/office/drawing/2014/main" id="{81BE126A-F33C-0327-7F0F-71121FE018A6}"/>
+            </a:ext>
+          </a:extLst>
+        </p:cNvPr>
         <p:cNvGrpSpPr/>
         <p:nvPr/>
       </p:nvGrpSpPr>
@@ -22034,7 +22559,7 @@
           <p:cNvPr id="2" name="제목 1">
             <a:extLst>
               <a:ext uri="{FF2B5EF4-FFF2-40B4-BE49-F238E27FC236}">
-                <a16:creationId xmlns:a16="http://schemas.microsoft.com/office/drawing/2014/main" id="{9EB2F96C-8F3C-F239-86A7-C8F20AED2928}"/>
+                <a16:creationId xmlns:a16="http://schemas.microsoft.com/office/drawing/2014/main" id="{E2F9F5D7-9ADC-F37C-21DC-F6B2F22F8841}"/>
               </a:ext>
             </a:extLst>
           </p:cNvPr>
@@ -22052,463 +22577,127 @@
           <a:p>
             <a:r>
               <a:rPr lang="ko-KR" altLang="en-US" b="1" dirty="0"/>
-              <a:t>최적화</a:t>
+              <a:t>애니메이션 기반 </a:t>
             </a:r>
             <a:r>
               <a:rPr lang="en-US" altLang="ko-KR" b="1" dirty="0"/>
-              <a:t>: </a:t>
-            </a:r>
-            <a:r>
-              <a:rPr lang="ko-KR" altLang="en-US" b="1" dirty="0"/>
-              <a:t>대용량 </a:t>
-            </a:r>
-            <a:r>
-              <a:rPr lang="en-US" altLang="ko-KR" b="1" dirty="0"/>
-              <a:t>XML </a:t>
-            </a:r>
-            <a:r>
-              <a:rPr lang="ko-KR" altLang="en-US" b="1" dirty="0"/>
-              <a:t>파일</a:t>
-            </a:r>
+              <a:t>Projectile</a:t>
+            </a:r>
+            <a:endParaRPr lang="ko-KR" altLang="en-US" b="1" dirty="0"/>
           </a:p>
         </p:txBody>
       </p:sp>
-      <p:sp>
-        <p:nvSpPr>
-          <p:cNvPr id="3" name="내용 개체 틀 2">
+      <p:pic>
+        <p:nvPicPr>
+          <p:cNvPr id="3" name="내용 개체 틀 11" descr="스크린샷이(가) 표시된 사진&#10;&#10;AI 생성 콘텐츠는 정확하지 않을 수 있습니다.">
             <a:extLst>
               <a:ext uri="{FF2B5EF4-FFF2-40B4-BE49-F238E27FC236}">
-                <a16:creationId xmlns:a16="http://schemas.microsoft.com/office/drawing/2014/main" id="{5CBA3459-E195-CA8E-AED7-4CBE5714889A}"/>
+                <a16:creationId xmlns:a16="http://schemas.microsoft.com/office/drawing/2014/main" id="{44F5700C-4473-49A2-D17E-CD09EE537502}"/>
               </a:ext>
             </a:extLst>
           </p:cNvPr>
-          <p:cNvSpPr>
-            <a:spLocks noGrp="1"/>
-          </p:cNvSpPr>
+          <p:cNvPicPr>
+            <a:picLocks noGrp="1" noChangeAspect="1"/>
+          </p:cNvPicPr>
           <p:nvPr>
             <p:ph idx="1"/>
           </p:nvPr>
-        </p:nvSpPr>
-        <p:spPr/>
-        <p:txBody>
-          <a:bodyPr/>
-          <a:lstStyle/>
-          <a:p>
-            <a:r>
-              <a:rPr lang="en-US" altLang="ko-KR" dirty="0"/>
-              <a:t>100,000 Frame</a:t>
-            </a:r>
-          </a:p>
-          <a:p>
-            <a:r>
-              <a:rPr lang="en-US" altLang="ko-KR" dirty="0"/>
-              <a:t>135MB</a:t>
-            </a:r>
-          </a:p>
-          <a:p>
-            <a:pPr marL="0" indent="0">
-              <a:buNone/>
-            </a:pPr>
-            <a:endParaRPr lang="en-US" altLang="ko-KR" dirty="0"/>
-          </a:p>
-        </p:txBody>
-      </p:sp>
-      <p:graphicFrame>
-        <p:nvGraphicFramePr>
-          <p:cNvPr id="6" name="표 5">
+        </p:nvPicPr>
+        <p:blipFill>
+          <a:blip r:embed="rId2">
+            <a:extLst>
+              <a:ext uri="{28A0092B-C50C-407E-A947-70E740481C1C}">
+                <a14:useLocalDpi xmlns:a14="http://schemas.microsoft.com/office/drawing/2010/main" val="0"/>
+              </a:ext>
+            </a:extLst>
+          </a:blip>
+          <a:stretch>
+            <a:fillRect/>
+          </a:stretch>
+        </p:blipFill>
+        <p:spPr>
+          <a:xfrm>
+            <a:off x="1754656" y="2124321"/>
+            <a:ext cx="2723075" cy="1815383"/>
+          </a:xfrm>
+        </p:spPr>
+      </p:pic>
+      <p:pic>
+        <p:nvPicPr>
+          <p:cNvPr id="7" name="그림 6" descr="스크린샷, 라인이(가) 표시된 사진&#10;&#10;AI 생성 콘텐츠는 정확하지 않을 수 있습니다.">
             <a:extLst>
               <a:ext uri="{FF2B5EF4-FFF2-40B4-BE49-F238E27FC236}">
-                <a16:creationId xmlns:a16="http://schemas.microsoft.com/office/drawing/2014/main" id="{160F2B37-05AE-3473-546A-383CE056F5E3}"/>
+                <a16:creationId xmlns:a16="http://schemas.microsoft.com/office/drawing/2014/main" id="{F4DE84AB-963A-1346-79E4-0BB3FD28A893}"/>
               </a:ext>
             </a:extLst>
           </p:cNvPr>
-          <p:cNvGraphicFramePr>
-            <a:graphicFrameLocks noGrp="1"/>
-          </p:cNvGraphicFramePr>
-          <p:nvPr>
-            <p:extLst>
-              <p:ext uri="{D42A27DB-BD31-4B8C-83A1-F6EECF244321}">
-                <p14:modId xmlns:p14="http://schemas.microsoft.com/office/powerpoint/2010/main" val="3679497737"/>
-              </p:ext>
-            </p:extLst>
-          </p:nvPr>
-        </p:nvGraphicFramePr>
-        <p:xfrm>
-          <a:off x="2426538" y="3106860"/>
-          <a:ext cx="7338924" cy="2240934"/>
-        </p:xfrm>
-        <a:graphic>
-          <a:graphicData uri="http://schemas.openxmlformats.org/drawingml/2006/table">
-            <a:tbl>
-              <a:tblPr firstRow="1" firstCol="1">
-                <a:tableStyleId>{5C22544A-7EE6-4342-B048-85BDC9FD1C3A}</a:tableStyleId>
-              </a:tblPr>
-              <a:tblGrid>
-                <a:gridCol w="3030874">
-                  <a:extLst>
-                    <a:ext uri="{9D8B030D-6E8A-4147-A177-3AD203B41FA5}">
-                      <a16:colId xmlns:a16="http://schemas.microsoft.com/office/drawing/2014/main" val="2374379353"/>
-                    </a:ext>
-                  </a:extLst>
-                </a:gridCol>
-                <a:gridCol w="2187019">
-                  <a:extLst>
-                    <a:ext uri="{9D8B030D-6E8A-4147-A177-3AD203B41FA5}">
-                      <a16:colId xmlns:a16="http://schemas.microsoft.com/office/drawing/2014/main" val="587336318"/>
-                    </a:ext>
-                  </a:extLst>
-                </a:gridCol>
-                <a:gridCol w="2121031">
-                  <a:extLst>
-                    <a:ext uri="{9D8B030D-6E8A-4147-A177-3AD203B41FA5}">
-                      <a16:colId xmlns:a16="http://schemas.microsoft.com/office/drawing/2014/main" val="661680372"/>
-                    </a:ext>
-                  </a:extLst>
-                </a:gridCol>
-              </a:tblGrid>
-              <a:tr h="342577">
-                <a:tc>
-                  <a:txBody>
-                    <a:bodyPr/>
-                    <a:lstStyle/>
-                    <a:p>
-                      <a:pPr latinLnBrk="1"/>
-                      <a:endParaRPr lang="ko-KR" altLang="en-US" dirty="0"/>
-                    </a:p>
-                  </a:txBody>
-                  <a:tcPr/>
-                </a:tc>
-                <a:tc>
-                  <a:txBody>
-                    <a:bodyPr/>
-                    <a:lstStyle/>
-                    <a:p>
-                      <a:pPr algn="ctr" latinLnBrk="1"/>
-                      <a:r>
-                        <a:rPr lang="ko-KR" altLang="en-US" dirty="0"/>
-                        <a:t>파일 크기</a:t>
-                      </a:r>
-                      <a:r>
-                        <a:rPr lang="en-US" altLang="ko-KR" dirty="0"/>
-                        <a:t>(MB)</a:t>
-                      </a:r>
-                      <a:endParaRPr lang="ko-KR" altLang="en-US" dirty="0"/>
-                    </a:p>
-                  </a:txBody>
-                  <a:tcPr/>
-                </a:tc>
-                <a:tc>
-                  <a:txBody>
-                    <a:bodyPr/>
-                    <a:lstStyle/>
-                    <a:p>
-                      <a:pPr algn="ctr" latinLnBrk="1"/>
-                      <a:r>
-                        <a:rPr lang="ko-KR" altLang="en-US" dirty="0"/>
-                        <a:t>로딩 속도</a:t>
-                      </a:r>
-                      <a:r>
-                        <a:rPr lang="en-US" altLang="ko-KR" dirty="0"/>
-                        <a:t>(</a:t>
-                      </a:r>
-                      <a:r>
-                        <a:rPr lang="en-US" altLang="ko-KR" dirty="0" err="1"/>
-                        <a:t>ms</a:t>
-                      </a:r>
-                      <a:r>
-                        <a:rPr lang="en-US" altLang="ko-KR" dirty="0"/>
-                        <a:t>)</a:t>
-                      </a:r>
-                      <a:endParaRPr lang="ko-KR" altLang="en-US" dirty="0"/>
-                    </a:p>
-                  </a:txBody>
-                  <a:tcPr/>
-                </a:tc>
-                <a:extLst>
-                  <a:ext uri="{0D108BD9-81ED-4DB2-BD59-A6C34878D82A}">
-                    <a16:rowId xmlns:a16="http://schemas.microsoft.com/office/drawing/2014/main" val="137458644"/>
-                  </a:ext>
-                </a:extLst>
-              </a:tr>
-              <a:tr h="342577">
-                <a:tc>
-                  <a:txBody>
-                    <a:bodyPr/>
-                    <a:lstStyle/>
-                    <a:p>
-                      <a:pPr latinLnBrk="1"/>
-                      <a:r>
-                        <a:rPr lang="en-US" altLang="ko-KR" dirty="0"/>
-                        <a:t>XML </a:t>
-                      </a:r>
-                      <a:r>
-                        <a:rPr lang="ko-KR" altLang="en-US" dirty="0"/>
-                        <a:t>파일</a:t>
-                      </a:r>
-                    </a:p>
-                  </a:txBody>
-                  <a:tcPr/>
-                </a:tc>
-                <a:tc>
-                  <a:txBody>
-                    <a:bodyPr/>
-                    <a:lstStyle/>
-                    <a:p>
-                      <a:pPr algn="ctr" latinLnBrk="1"/>
-                      <a:r>
-                        <a:rPr lang="en-US" altLang="ko-KR" dirty="0"/>
-                        <a:t>135</a:t>
-                      </a:r>
-                      <a:endParaRPr lang="ko-KR" altLang="en-US" dirty="0"/>
-                    </a:p>
-                  </a:txBody>
-                  <a:tcPr/>
-                </a:tc>
-                <a:tc>
-                  <a:txBody>
-                    <a:bodyPr/>
-                    <a:lstStyle/>
-                    <a:p>
-                      <a:pPr algn="ctr" latinLnBrk="1"/>
-                      <a:r>
-                        <a:rPr lang="en-US" altLang="ko-KR" dirty="0"/>
-                        <a:t>6646</a:t>
-                      </a:r>
-                      <a:endParaRPr lang="ko-KR" altLang="en-US" dirty="0"/>
-                    </a:p>
-                  </a:txBody>
-                  <a:tcPr/>
-                </a:tc>
-                <a:extLst>
-                  <a:ext uri="{0D108BD9-81ED-4DB2-BD59-A6C34878D82A}">
-                    <a16:rowId xmlns:a16="http://schemas.microsoft.com/office/drawing/2014/main" val="2907623311"/>
-                  </a:ext>
-                </a:extLst>
-              </a:tr>
-              <a:tr h="342577">
-                <a:tc>
-                  <a:txBody>
-                    <a:bodyPr/>
-                    <a:lstStyle/>
-                    <a:p>
-                      <a:pPr latinLnBrk="1"/>
-                      <a:r>
-                        <a:rPr lang="en-US" altLang="ko-KR" dirty="0"/>
-                        <a:t>XML + </a:t>
-                      </a:r>
-                      <a:r>
-                        <a:rPr lang="en-US" altLang="ko-KR" dirty="0" err="1"/>
-                        <a:t>zlib</a:t>
-                      </a:r>
-                      <a:endParaRPr lang="en-US" altLang="ko-KR" dirty="0"/>
-                    </a:p>
-                  </a:txBody>
-                  <a:tcPr/>
-                </a:tc>
-                <a:tc>
-                  <a:txBody>
-                    <a:bodyPr/>
-                    <a:lstStyle/>
-                    <a:p>
-                      <a:pPr algn="ctr" latinLnBrk="1"/>
-                      <a:r>
-                        <a:rPr lang="en-US" altLang="ko-KR" dirty="0"/>
-                        <a:t>14.6</a:t>
-                      </a:r>
-                      <a:endParaRPr lang="ko-KR" altLang="en-US" dirty="0"/>
-                    </a:p>
-                  </a:txBody>
-                  <a:tcPr/>
-                </a:tc>
-                <a:tc>
-                  <a:txBody>
-                    <a:bodyPr/>
-                    <a:lstStyle/>
-                    <a:p>
-                      <a:pPr algn="ctr" latinLnBrk="1"/>
-                      <a:r>
-                        <a:rPr lang="en-US" altLang="ko-KR" dirty="0"/>
-                        <a:t>6029</a:t>
-                      </a:r>
-                      <a:endParaRPr lang="ko-KR" altLang="en-US" dirty="0"/>
-                    </a:p>
-                  </a:txBody>
-                  <a:tcPr/>
-                </a:tc>
-                <a:extLst>
-                  <a:ext uri="{0D108BD9-81ED-4DB2-BD59-A6C34878D82A}">
-                    <a16:rowId xmlns:a16="http://schemas.microsoft.com/office/drawing/2014/main" val="158919561"/>
-                  </a:ext>
-                </a:extLst>
-              </a:tr>
-              <a:tr h="342577">
-                <a:tc>
-                  <a:txBody>
-                    <a:bodyPr/>
-                    <a:lstStyle/>
-                    <a:p>
-                      <a:pPr latinLnBrk="1"/>
-                      <a:r>
-                        <a:rPr lang="en-US" altLang="ko-KR" dirty="0"/>
-                        <a:t>Binary + </a:t>
-                      </a:r>
-                      <a:r>
-                        <a:rPr lang="en-US" altLang="ko-KR" dirty="0" err="1"/>
-                        <a:t>zlib</a:t>
-                      </a:r>
-                      <a:endParaRPr lang="ko-KR" altLang="en-US" dirty="0"/>
-                    </a:p>
-                  </a:txBody>
-                  <a:tcPr/>
-                </a:tc>
-                <a:tc>
-                  <a:txBody>
-                    <a:bodyPr/>
-                    <a:lstStyle/>
-                    <a:p>
-                      <a:pPr algn="ctr" latinLnBrk="1"/>
-                      <a:r>
-                        <a:rPr lang="en-US" altLang="ko-KR" dirty="0"/>
-                        <a:t>11.6</a:t>
-                      </a:r>
-                      <a:endParaRPr lang="ko-KR" altLang="en-US" dirty="0"/>
-                    </a:p>
-                  </a:txBody>
-                  <a:tcPr/>
-                </a:tc>
-                <a:tc>
-                  <a:txBody>
-                    <a:bodyPr/>
-                    <a:lstStyle/>
-                    <a:p>
-                      <a:pPr algn="ctr" latinLnBrk="1"/>
-                      <a:r>
-                        <a:rPr lang="en-US" altLang="ko-KR" dirty="0"/>
-                        <a:t>134</a:t>
-                      </a:r>
-                      <a:endParaRPr lang="ko-KR" altLang="en-US" dirty="0"/>
-                    </a:p>
-                  </a:txBody>
-                  <a:tcPr/>
-                </a:tc>
-                <a:extLst>
-                  <a:ext uri="{0D108BD9-81ED-4DB2-BD59-A6C34878D82A}">
-                    <a16:rowId xmlns:a16="http://schemas.microsoft.com/office/drawing/2014/main" val="3096869042"/>
-                  </a:ext>
-                </a:extLst>
-              </a:tr>
-              <a:tr h="342577">
-                <a:tc>
-                  <a:txBody>
-                    <a:bodyPr/>
-                    <a:lstStyle/>
-                    <a:p>
-                      <a:pPr latinLnBrk="1"/>
-                      <a:r>
-                        <a:rPr lang="en-US" altLang="ko-KR" dirty="0"/>
-                        <a:t>Binary + lz4</a:t>
-                      </a:r>
-                      <a:endParaRPr lang="ko-KR" altLang="en-US" dirty="0"/>
-                    </a:p>
-                  </a:txBody>
-                  <a:tcPr/>
-                </a:tc>
-                <a:tc>
-                  <a:txBody>
-                    <a:bodyPr/>
-                    <a:lstStyle/>
-                    <a:p>
-                      <a:pPr algn="ctr" latinLnBrk="1"/>
-                      <a:r>
-                        <a:rPr lang="en-US" altLang="ko-KR" dirty="0"/>
-                        <a:t>20.5</a:t>
-                      </a:r>
-                      <a:endParaRPr lang="ko-KR" altLang="en-US" dirty="0"/>
-                    </a:p>
-                  </a:txBody>
-                  <a:tcPr/>
-                </a:tc>
-                <a:tc>
-                  <a:txBody>
-                    <a:bodyPr/>
-                    <a:lstStyle/>
-                    <a:p>
-                      <a:pPr algn="ctr" latinLnBrk="1"/>
-                      <a:r>
-                        <a:rPr lang="en-US" altLang="ko-KR" dirty="0"/>
-                        <a:t>65</a:t>
-                      </a:r>
-                      <a:endParaRPr lang="ko-KR" altLang="en-US" dirty="0"/>
-                    </a:p>
-                  </a:txBody>
-                  <a:tcPr/>
-                </a:tc>
-                <a:extLst>
-                  <a:ext uri="{0D108BD9-81ED-4DB2-BD59-A6C34878D82A}">
-                    <a16:rowId xmlns:a16="http://schemas.microsoft.com/office/drawing/2014/main" val="558521025"/>
-                  </a:ext>
-                </a:extLst>
-              </a:tr>
-              <a:tr h="412134">
-                <a:tc>
-                  <a:txBody>
-                    <a:bodyPr/>
-                    <a:lstStyle/>
-                    <a:p>
-                      <a:pPr latinLnBrk="1"/>
-                      <a:r>
-                        <a:rPr lang="en-US" altLang="ko-KR" dirty="0"/>
-                        <a:t>Binary + lz4 + Zero-Copy</a:t>
-                      </a:r>
-                      <a:endParaRPr lang="ko-KR" altLang="en-US" dirty="0"/>
-                    </a:p>
-                  </a:txBody>
-                  <a:tcPr/>
-                </a:tc>
-                <a:tc>
-                  <a:txBody>
-                    <a:bodyPr/>
-                    <a:lstStyle/>
-                    <a:p>
-                      <a:pPr algn="ctr" latinLnBrk="1"/>
-                      <a:r>
-                        <a:rPr lang="en-US" altLang="ko-KR" dirty="0"/>
-                        <a:t>20.5</a:t>
-                      </a:r>
-                      <a:endParaRPr lang="ko-KR" altLang="en-US" dirty="0"/>
-                    </a:p>
-                  </a:txBody>
-                  <a:tcPr/>
-                </a:tc>
-                <a:tc>
-                  <a:txBody>
-                    <a:bodyPr/>
-                    <a:lstStyle/>
-                    <a:p>
-                      <a:pPr algn="ctr" latinLnBrk="1"/>
-                      <a:r>
-                        <a:rPr lang="en-US" altLang="ko-KR" dirty="0"/>
-                        <a:t>46</a:t>
-                      </a:r>
-                      <a:endParaRPr lang="ko-KR" altLang="en-US" dirty="0"/>
-                    </a:p>
-                  </a:txBody>
-                  <a:tcPr/>
-                </a:tc>
-                <a:extLst>
-                  <a:ext uri="{0D108BD9-81ED-4DB2-BD59-A6C34878D82A}">
-                    <a16:rowId xmlns:a16="http://schemas.microsoft.com/office/drawing/2014/main" val="2890192193"/>
-                  </a:ext>
-                </a:extLst>
-              </a:tr>
-            </a:tbl>
-          </a:graphicData>
-        </a:graphic>
-      </p:graphicFrame>
+          <p:cNvPicPr>
+            <a:picLocks noChangeAspect="1"/>
+          </p:cNvPicPr>
+          <p:nvPr/>
+        </p:nvPicPr>
+        <p:blipFill>
+          <a:blip r:embed="rId3">
+            <a:extLst>
+              <a:ext uri="{28A0092B-C50C-407E-A947-70E740481C1C}">
+                <a14:useLocalDpi xmlns:a14="http://schemas.microsoft.com/office/drawing/2010/main" val="0"/>
+              </a:ext>
+            </a:extLst>
+          </a:blip>
+          <a:stretch>
+            <a:fillRect/>
+          </a:stretch>
+        </p:blipFill>
+        <p:spPr>
+          <a:xfrm>
+            <a:off x="1754656" y="4296266"/>
+            <a:ext cx="2723075" cy="2042306"/>
+          </a:xfrm>
+          <a:prstGeom prst="rect">
+            <a:avLst/>
+          </a:prstGeom>
+        </p:spPr>
+      </p:pic>
+      <p:pic>
+        <p:nvPicPr>
+          <p:cNvPr id="10" name="그림 9" descr="눈, 겨울, 널빤지, 목재이(가) 표시된 사진&#10;&#10;AI 생성 콘텐츠는 정확하지 않을 수 있습니다.">
+            <a:extLst>
+              <a:ext uri="{FF2B5EF4-FFF2-40B4-BE49-F238E27FC236}">
+                <a16:creationId xmlns:a16="http://schemas.microsoft.com/office/drawing/2014/main" id="{79415477-C8D1-9144-3CF5-BA3ECD748AAB}"/>
+              </a:ext>
+            </a:extLst>
+          </p:cNvPr>
+          <p:cNvPicPr>
+            <a:picLocks noChangeAspect="1"/>
+          </p:cNvPicPr>
+          <p:nvPr/>
+        </p:nvPicPr>
+        <p:blipFill>
+          <a:blip r:embed="rId4">
+            <a:extLst>
+              <a:ext uri="{28A0092B-C50C-407E-A947-70E740481C1C}">
+                <a14:useLocalDpi xmlns:a14="http://schemas.microsoft.com/office/drawing/2010/main" val="0"/>
+              </a:ext>
+            </a:extLst>
+          </a:blip>
+          <a:stretch>
+            <a:fillRect/>
+          </a:stretch>
+        </p:blipFill>
+        <p:spPr>
+          <a:xfrm>
+            <a:off x="6383518" y="2425978"/>
+            <a:ext cx="4572000" cy="3409950"/>
+          </a:xfrm>
+          <a:prstGeom prst="rect">
+            <a:avLst/>
+          </a:prstGeom>
+        </p:spPr>
+      </p:pic>
     </p:spTree>
     <p:extLst>
       <p:ext uri="{BB962C8B-B14F-4D97-AF65-F5344CB8AC3E}">
-        <p14:creationId xmlns:p14="http://schemas.microsoft.com/office/powerpoint/2010/main" val="4029030819"/>
+        <p14:creationId xmlns:p14="http://schemas.microsoft.com/office/powerpoint/2010/main" val="189107928"/>
       </p:ext>
     </p:extLst>
   </p:cSld>
